--- a/프로젝트 구조.pptx
+++ b/프로젝트 구조.pptx
@@ -3386,6 +3386,24 @@
 <file path=ppt/slides/slide1.xml><?xml version="1.0" encoding="utf-8"?>
 <p:sld xmlns:a="http://schemas.openxmlformats.org/drawingml/2006/main" xmlns:r="http://schemas.openxmlformats.org/officeDocument/2006/relationships" xmlns:p="http://schemas.openxmlformats.org/presentationml/2006/main">
   <p:cSld>
+    <p:bg>
+      <p:bgPr>
+        <a:gradFill>
+          <a:gsLst>
+            <a:gs pos="0">
+              <a:schemeClr val="tx2">
+                <a:lumMod val="10000"/>
+              </a:schemeClr>
+            </a:gs>
+            <a:gs pos="100000">
+              <a:schemeClr val="bg1"/>
+            </a:gs>
+          </a:gsLst>
+          <a:lin ang="5400000" scaled="1"/>
+        </a:gradFill>
+        <a:effectLst/>
+      </p:bgPr>
+    </p:bg>
     <p:spTree>
       <p:nvGrpSpPr>
         <p:cNvPr id="1" name=""/>
